--- a/week-02/presentations/ppts/day-03-product-design-ux-principles.pptx
+++ b/week-02/presentations/ppts/day-03-product-design-ux-principles.pptx
@@ -7749,16 +7749,7 @@
             </a:pPr>
             <a:r>
               <a:rPr/>
-              <a:t>“This screen feels weird. Can we redo it?”</a:t>
-            </a:r>
-          </a:p>
-          <a:p>
-            <a:pPr lvl="0" indent="0" marL="0">
-              <a:buNone/>
-            </a:pPr>
-            <a:r>
-              <a:rPr/>
-              <a:t>Loses the conversation in 30 seconds.</a:t>
+              <a:t>“This screen feels weird. Can we redo it?” Loses the conversation in 30 seconds.</a:t>
             </a:r>
           </a:p>
           <a:p>
@@ -7776,16 +7767,7 @@
             </a:pPr>
             <a:r>
               <a:rPr/>
-              <a:t>“This screen violates Nielsen #5 (error prevention) and #6 (recognition over recall). The cost shows up in our reconcile-abandonment signal.”</a:t>
-            </a:r>
-          </a:p>
-          <a:p>
-            <a:pPr lvl="0" indent="0" marL="0">
-              <a:buNone/>
-            </a:pPr>
-            <a:r>
-              <a:rPr/>
-              <a:t>Wins the conversation.</a:t>
+              <a:t>“This screen violates Nielsen #5 (error prevention) and #6 (recognition over recall). The cost shows up in our reconcile-abandonment signal.” Wins the conversation.</a:t>
             </a:r>
           </a:p>
         </p:txBody>
@@ -8230,7 +8212,7 @@
             </a:r>
           </a:p>
           <a:p>
-            <a:pPr lvl="1" indent="-342900" marL="685800">
+            <a:pPr lvl="0" indent="-342900" marL="342900">
               <a:buAutoNum startAt="12" type="arabicPeriod"/>
             </a:pPr>
             <a:r>
@@ -8239,7 +8221,7 @@
             </a:r>
           </a:p>
           <a:p>
-            <a:pPr lvl="2" indent="0" marL="685800">
+            <a:pPr lvl="1" indent="0" marL="342900">
               <a:buNone/>
             </a:pPr>
             <a:r>
@@ -8248,7 +8230,7 @@
             </a:r>
           </a:p>
           <a:p>
-            <a:pPr lvl="2" indent="-342900" marL="1028700">
+            <a:pPr lvl="0" indent="-342900" marL="342900">
               <a:buAutoNum startAt="13" type="arabicPeriod"/>
             </a:pPr>
             <a:r>
@@ -8257,7 +8239,7 @@
             </a:r>
           </a:p>
           <a:p>
-            <a:pPr lvl="3" indent="0" marL="1028700">
+            <a:pPr lvl="1" indent="0" marL="342900">
               <a:buNone/>
             </a:pPr>
             <a:r>
@@ -8266,7 +8248,7 @@
             </a:r>
           </a:p>
           <a:p>
-            <a:pPr lvl="3" indent="0" marL="1028700">
+            <a:pPr lvl="0" indent="0" marL="0">
               <a:buNone/>
             </a:pPr>
             <a:r>

--- a/week-02/presentations/ppts/day-03-product-design-ux-principles.pptx
+++ b/week-02/presentations/ppts/day-03-product-design-ux-principles.pptx
@@ -5610,7 +5610,7 @@
             </a:pPr>
             <a:r>
               <a:rPr/>
-              <a:t>Color contrast 4.5:1</a:t>
+              <a:t>Color contrast 4.5:1 (text) / 3:1 (large text)</a:t>
             </a:r>
           </a:p>
           <a:p>
@@ -8373,7 +8373,7 @@
             </a:pPr>
             <a:r>
               <a:rPr/>
-              <a:t>⏱ 5 min solo · 10 min pool · 10 min cull · 5 min readout prep</a:t>
+              <a:t>⏱ 5 min solo · 15 min pool · 10 min cull · 5 min readout prep</a:t>
             </a:r>
           </a:p>
         </p:txBody>

--- a/week-02/presentations/ppts/day-03-product-design-ux-principles.pptx
+++ b/week-02/presentations/ppts/day-03-product-design-ux-principles.pptx
@@ -6603,7 +6603,7 @@
             </a:pPr>
             <a:r>
               <a:rPr/>
-              <a:t>Specific, decision-making, memorable</a:t>
+              <a:t>Specific, decision-making</a:t>
             </a:r>
           </a:p>
           <a:p>
@@ -6621,25 +6621,25 @@
             </a:pPr>
             <a:r>
               <a:rPr/>
-              <a:t>Names a constraint, drives concrete choices</a:t>
-            </a:r>
-          </a:p>
-          <a:p>
-            <a:pPr lvl="0" indent="0" marL="0">
-              <a:buNone/>
-            </a:pPr>
-            <a:r>
-              <a:rPr/>
-              <a:t>“Power users get keyboard shortcuts. New users get them visible too.”</a:t>
-            </a:r>
-          </a:p>
-          <a:p>
-            <a:pPr lvl="0" indent="0" marL="0">
-              <a:buNone/>
-            </a:pPr>
-            <a:r>
-              <a:rPr/>
-              <a:t>Resolves a tension explicitly</a:t>
+              <a:t>Names a constraint</a:t>
+            </a:r>
+          </a:p>
+          <a:p>
+            <a:pPr lvl="0" indent="0" marL="0">
+              <a:buNone/>
+            </a:pPr>
+            <a:r>
+              <a:rPr/>
+              <a:t>“Power users get shortcuts. New users get them visible too.”</a:t>
+            </a:r>
+          </a:p>
+          <a:p>
+            <a:pPr lvl="0" indent="0" marL="0">
+              <a:buNone/>
+            </a:pPr>
+            <a:r>
+              <a:rPr/>
+              <a:t>Resolves a tension</a:t>
             </a:r>
           </a:p>
           <a:p>

--- a/week-02/presentations/ppts/day-03-product-design-ux-principles.pptx
+++ b/week-02/presentations/ppts/day-03-product-design-ux-principles.pptx
@@ -5379,6 +5379,15 @@
               <a:t>The 8 checks every TPM should run before any PRD ships</a:t>
             </a:r>
           </a:p>
+          <a:p>
+            <a:pPr lvl="0" indent="0" marL="0">
+              <a:buNone/>
+            </a:pPr>
+            <a:r>
+              <a:rPr/>
+              <a:t>A Product Requirements Document (PRD) is the spec a squad builds from.</a:t>
+            </a:r>
+          </a:p>
         </p:txBody>
       </p:sp>
     </p:spTree>
@@ -5448,7 +5457,7 @@
             </a:pPr>
             <a:r>
               <a:rPr/>
-              <a:t>Accessibility is a regulatory floor (ADA, Section 508, EAA), an SEO floor, and a usability ceiling. Fixes for keyboard-only users almost always fix mouse-user errors too.</a:t>
+              <a:t>Accessibility is a regulatory floor (ADA, Section 508, the European Accessibility Act), a search-engine-optimization (SEO) floor, and a usability ceiling. Fixes for keyboard-only users almost always fix mouse-user errors too.</a:t>
             </a:r>
           </a:p>
           <a:p>

--- a/week-02/presentations/ppts/day-03-product-design-ux-principles.pptx
+++ b/week-02/presentations/ppts/day-03-product-design-ux-principles.pptx
@@ -792,7 +792,7 @@
             </a:pPr>
             <a:r>
               <a:rPr/>
-              <a:t>If a triad finishes early, push them to score severity. Most triads under-rate failures because they’re not living the keyboard-only experience.</a:t>
+              <a:t>If a quad finishes early, push them to score severity. Most quads under-rate failures because they’re not living the keyboard-only experience.</a:t>
             </a:r>
           </a:p>
         </p:txBody>
@@ -874,7 +874,7 @@
             </a:pPr>
             <a:r>
               <a:rPr/>
-              <a:t>Move from generic calibration to the triad’s own product surface. Insist on a real flow — the audit muscle needs reps on something that matters.</a:t>
+              <a:t>Move from generic calibration to the quad’s own product surface. Insist on a real flow — the audit muscle needs reps on something that matters.</a:t>
             </a:r>
           </a:p>
         </p:txBody>
@@ -1038,7 +1038,7 @@
             </a:pPr>
             <a:r>
               <a:rPr/>
-              <a:t>Severity is the single most-disputed score. Encourage debate — that’s the design conversation triads should be rehearsing.</a:t>
+              <a:t>Severity is the single most-disputed score. Encourage debate — that’s the design conversation quads should be rehearsing.</a:t>
             </a:r>
           </a:p>
         </p:txBody>
@@ -1202,7 +1202,7 @@
             </a:pPr>
             <a:r>
               <a:rPr/>
-              <a:t>The day’s deliverable. Three is a hard cap — memorability beats completeness. Triads that resist culling produce slogans, not principles.</a:t>
+              <a:t>The day’s deliverable. Three is a hard cap — memorability beats completeness. Quads that resist culling produce slogans, not principles.</a:t>
             </a:r>
           </a:p>
         </p:txBody>
@@ -1366,7 +1366,7 @@
             </a:pPr>
             <a:r>
               <a:rPr/>
-              <a:t>Three is a hard ceiling. Triads who want four are not yet committed enough to any of them.</a:t>
+              <a:t>Three is a hard ceiling. Quads who want four are not yet committed enough to any of them.</a:t>
             </a:r>
           </a:p>
         </p:txBody>
@@ -5847,16 +5847,16 @@
             </a:pPr>
             <a:r>
               <a:rPr b="1"/>
-              <a:t>Triads • 40 minutes</a:t>
-            </a:r>
-          </a:p>
-          <a:p>
-            <a:pPr lvl="0" indent="0" marL="0">
-              <a:buNone/>
-            </a:pPr>
-            <a:r>
-              <a:rPr/>
-              <a:t>Run the 8-check floor on the FieldPulse mobile or your chosen surface. Split the checks across triad members so all 8 are covered (plus one overlap).</a:t>
+              <a:t>Quads • 40 minutes</a:t>
+            </a:r>
+          </a:p>
+          <a:p>
+            <a:pPr lvl="0" indent="0" marL="0">
+              <a:buNone/>
+            </a:pPr>
+            <a:r>
+              <a:rPr/>
+              <a:t>Run the 8-check floor on the FieldPulse mobile or your chosen surface. Split the checks across quad members so all 8 are covered (plus one overlap).</a:t>
             </a:r>
           </a:p>
           <a:p>
@@ -5958,7 +5958,7 @@
             </a:pPr>
             <a:r>
               <a:rPr b="1"/>
-              <a:t>Apply the calibrated eye + the floor to the triad’s chosen flow</a:t>
+              <a:t>Apply the calibrated eye + the floor to the quad’s chosen flow</a:t>
             </a:r>
           </a:p>
         </p:txBody>
@@ -6375,16 +6375,16 @@
             </a:pPr>
             <a:r>
               <a:rPr b="1"/>
-              <a:t>Triads • 40 minutes</a:t>
-            </a:r>
-          </a:p>
-          <a:p>
-            <a:pPr lvl="0" indent="0" marL="0">
-              <a:buNone/>
-            </a:pPr>
-            <a:r>
-              <a:rPr/>
-              <a:t>Use the audit template on your triad’s chosen flow. Severity-score each violation. Capture strengths.</a:t>
+              <a:t>Quads • 40 minutes</a:t>
+            </a:r>
+          </a:p>
+          <a:p>
+            <a:pPr lvl="0" indent="0" marL="0">
+              <a:buNone/>
+            </a:pPr>
+            <a:r>
+              <a:rPr/>
+              <a:t>Use the audit template on your quad’s chosen flow. Severity-score each violation. Capture strengths.</a:t>
             </a:r>
           </a:p>
           <a:p>
@@ -6978,7 +6978,7 @@
             </a:pPr>
             <a:r>
               <a:rPr b="1"/>
-              <a:t>Triads • 45 minutes • Readouts</a:t>
+              <a:t>Quads • 45 minutes • Readouts</a:t>
             </a:r>
           </a:p>
           <a:p>
@@ -7140,7 +7140,7 @@
             </a:pPr>
             <a:r>
               <a:rPr/>
-              <a:t>3 design principles per triad</a:t>
+              <a:t>3 design principles per quad</a:t>
             </a:r>
           </a:p>
           <a:p>
@@ -7185,7 +7185,7 @@
             </a:pPr>
             <a:r>
               <a:rPr/>
-              <a:t>Bring to Day 4: Your triad’s NS Defense Card, Tier Sheet, and 3 design principles — they all become inputs to AI summarization tomorrow.</a:t>
+              <a:t>Bring to Day 4: Your quad’s NS Defense Card, Tier Sheet, and 3 design principles — they all become inputs to AI summarization tomorrow.</a:t>
             </a:r>
           </a:p>
         </p:txBody>
@@ -7485,7 +7485,7 @@
             </a:pPr>
             <a:r>
               <a:rPr/>
-              <a:t>What product surface is your triad auditing?</a:t>
+              <a:t>What product surface is your quad auditing?</a:t>
             </a:r>
           </a:p>
           <a:p>
@@ -8337,16 +8337,16 @@
             </a:pPr>
             <a:r>
               <a:rPr b="1"/>
-              <a:t>Triads • 35 minutes</a:t>
-            </a:r>
-          </a:p>
-          <a:p>
-            <a:pPr lvl="0" indent="0" marL="0">
-              <a:buNone/>
-            </a:pPr>
-            <a:r>
-              <a:rPr/>
-              <a:t>Walk through a B2B SaaS none of your triad uses (provided link). Each member silently captures 3 heuristic violations.</a:t>
+              <a:t>Quads • 35 minutes</a:t>
+            </a:r>
+          </a:p>
+          <a:p>
+            <a:pPr lvl="0" indent="0" marL="0">
+              <a:buNone/>
+            </a:pPr>
+            <a:r>
+              <a:rPr/>
+              <a:t>Walk through a B2B SaaS none of your quad uses (provided link). Each member silently captures 3 heuristic violations.</a:t>
             </a:r>
           </a:p>
           <a:p>

--- a/week-02/presentations/ppts/day-03-product-design-ux-principles.pptx
+++ b/week-02/presentations/ppts/day-03-product-design-ux-principles.pptx
@@ -5847,7 +5847,7 @@
             </a:pPr>
             <a:r>
               <a:rPr b="1"/>
-              <a:t>Quads • 40 minutes</a:t>
+              <a:t>Quads • 50 minutes</a:t>
             </a:r>
           </a:p>
           <a:p>
@@ -6375,7 +6375,7 @@
             </a:pPr>
             <a:r>
               <a:rPr b="1"/>
-              <a:t>Quads • 40 minutes</a:t>
+              <a:t>Quads • 50 minutes</a:t>
             </a:r>
           </a:p>
           <a:p>
@@ -6978,7 +6978,7 @@
             </a:pPr>
             <a:r>
               <a:rPr b="1"/>
-              <a:t>Quads • 45 minutes • Readouts</a:t>
+              <a:t>Quads • 55 minutes • Readouts</a:t>
             </a:r>
           </a:p>
           <a:p>
@@ -8337,7 +8337,7 @@
             </a:pPr>
             <a:r>
               <a:rPr b="1"/>
-              <a:t>Quads • 35 minutes</a:t>
+              <a:t>Quads • 45 minutes</a:t>
             </a:r>
           </a:p>
           <a:p>

--- a/week-02/presentations/ppts/day-03-product-design-ux-principles.pptx
+++ b/week-02/presentations/ppts/day-03-product-design-ux-principles.pptx
@@ -5883,7 +5883,7 @@
             </a:pPr>
             <a:r>
               <a:rPr/>
-              <a:t>⏱ 25 min audit · 10 min cross-link to heuristics · 5 min summarize</a:t>
+              <a:t>⏱ 35 min audit · 10 min cross-link to heuristics · 5 min summarize</a:t>
             </a:r>
           </a:p>
         </p:txBody>
@@ -6402,7 +6402,7 @@
             </a:pPr>
             <a:r>
               <a:rPr/>
-              <a:t>15 min: pool + score severity</a:t>
+              <a:t>25 min: pool + score severity</a:t>
             </a:r>
           </a:p>
           <a:p>
@@ -7005,7 +7005,7 @@
             </a:pPr>
             <a:r>
               <a:rPr/>
-              <a:t>15 min: draft 5 candidates</a:t>
+              <a:t>25 min: draft 5 candidates</a:t>
             </a:r>
           </a:p>
           <a:p>
@@ -8382,7 +8382,7 @@
             </a:pPr>
             <a:r>
               <a:rPr/>
-              <a:t>⏱ 5 min solo · 15 min pool · 10 min cull · 5 min readout prep</a:t>
+              <a:t>⏱ 5 min solo · 25 min pool · 10 min cull · 5 min readout prep</a:t>
             </a:r>
           </a:p>
         </p:txBody>
